--- a/Cloud Computing/05.7.6. Distributed File Systems.pptx
+++ b/Cloud Computing/05.7.6. Distributed File Systems.pptx
@@ -241,7 +241,7 @@
             <a:fld id="{2F0940CE-BE1D-4C40-AF8B-3898A4D1F5EC}" type="datetimeFigureOut">
               <a:rPr lang="en-US" smtClean="0"/>
               <a:pPr/>
-              <a:t>11/17/2025</a:t>
+              <a:t>7/15/2026</a:t>
             </a:fld>
             <a:endParaRPr lang="en-US"/>
           </a:p>
@@ -780,7 +780,7 @@
               <a:pPr>
                 <a:defRPr/>
               </a:pPr>
-              <a:t>11/17/2025</a:t>
+              <a:t>7/15/2026</a:t>
             </a:fld>
             <a:endParaRPr lang="en-US"/>
           </a:p>
@@ -972,7 +972,7 @@
               <a:pPr>
                 <a:defRPr/>
               </a:pPr>
-              <a:t>11/17/2025</a:t>
+              <a:t>7/15/2026</a:t>
             </a:fld>
             <a:endParaRPr lang="en-US"/>
           </a:p>
@@ -1174,7 +1174,7 @@
               <a:pPr>
                 <a:defRPr/>
               </a:pPr>
-              <a:t>11/17/2025</a:t>
+              <a:t>7/15/2026</a:t>
             </a:fld>
             <a:endParaRPr lang="en-US"/>
           </a:p>
@@ -1366,7 +1366,7 @@
               <a:pPr>
                 <a:defRPr/>
               </a:pPr>
-              <a:t>11/17/2025</a:t>
+              <a:t>7/15/2026</a:t>
             </a:fld>
             <a:endParaRPr lang="en-US"/>
           </a:p>
@@ -1634,7 +1634,7 @@
               <a:pPr>
                 <a:defRPr/>
               </a:pPr>
-              <a:t>11/17/2025</a:t>
+              <a:t>7/15/2026</a:t>
             </a:fld>
             <a:endParaRPr lang="en-US"/>
           </a:p>
@@ -1944,7 +1944,7 @@
               <a:pPr>
                 <a:defRPr/>
               </a:pPr>
-              <a:t>11/17/2025</a:t>
+              <a:t>7/15/2026</a:t>
             </a:fld>
             <a:endParaRPr lang="en-US"/>
           </a:p>
@@ -2388,7 +2388,7 @@
               <a:pPr>
                 <a:defRPr/>
               </a:pPr>
-              <a:t>11/17/2025</a:t>
+              <a:t>7/15/2026</a:t>
             </a:fld>
             <a:endParaRPr lang="en-US"/>
           </a:p>
@@ -2528,7 +2528,7 @@
               <a:pPr>
                 <a:defRPr/>
               </a:pPr>
-              <a:t>11/17/2025</a:t>
+              <a:t>7/15/2026</a:t>
             </a:fld>
             <a:endParaRPr lang="en-US"/>
           </a:p>
@@ -2645,7 +2645,7 @@
               <a:pPr>
                 <a:defRPr/>
               </a:pPr>
-              <a:t>11/17/2025</a:t>
+              <a:t>7/15/2026</a:t>
             </a:fld>
             <a:endParaRPr lang="en-US"/>
           </a:p>
@@ -2944,7 +2944,7 @@
               <a:pPr>
                 <a:defRPr/>
               </a:pPr>
-              <a:t>11/17/2025</a:t>
+              <a:t>7/15/2026</a:t>
             </a:fld>
             <a:endParaRPr lang="en-US"/>
           </a:p>
@@ -3222,7 +3222,7 @@
               <a:pPr>
                 <a:defRPr/>
               </a:pPr>
-              <a:t>11/17/2025</a:t>
+              <a:t>7/15/2026</a:t>
             </a:fld>
             <a:endParaRPr lang="en-US"/>
           </a:p>
@@ -3470,7 +3470,7 @@
               <a:pPr>
                 <a:defRPr/>
               </a:pPr>
-              <a:t>11/17/2025</a:t>
+              <a:t>7/15/2026</a:t>
             </a:fld>
             <a:endParaRPr lang="en-US"/>
           </a:p>
@@ -3998,7 +3998,6 @@
               <a:rPr lang="en-US" sz="6000" dirty="0" smtClean="0"/>
               <a:t>Distributed File Systems</a:t>
             </a:r>
-            <a:endParaRPr lang="en-US" sz="6000" dirty="0" smtClean="0"/>
           </a:p>
         </p:txBody>
       </p:sp>
@@ -4145,11 +4144,7 @@
             <a:pPr algn="l"/>
             <a:r>
               <a:rPr lang="en-US" dirty="0" smtClean="0"/>
-              <a:t>4. Start </a:t>
-            </a:r>
-            <a:r>
-              <a:rPr lang="en-US" dirty="0" smtClean="0"/>
-              <a:t>NATS Streaming Server</a:t>
+              <a:t>4. Start NATS Streaming Server</a:t>
             </a:r>
           </a:p>
         </p:txBody>
@@ -4766,11 +4761,7 @@
             <a:pPr algn="l"/>
             <a:r>
               <a:rPr lang="en-US" dirty="0" smtClean="0"/>
-              <a:t>6. Compile </a:t>
-            </a:r>
-            <a:r>
-              <a:rPr lang="en-US" dirty="0" smtClean="0"/>
-              <a:t>Source Code</a:t>
+              <a:t>6. Compile Source Code</a:t>
             </a:r>
             <a:endParaRPr lang="en-US" dirty="0"/>
           </a:p>
@@ -4998,11 +4989,7 @@
             <a:pPr algn="l"/>
             <a:r>
               <a:rPr lang="en-US" dirty="0" smtClean="0"/>
-              <a:t>7. Import </a:t>
-            </a:r>
-            <a:r>
-              <a:rPr lang="en-US" dirty="0" smtClean="0"/>
-              <a:t>Postman Collection</a:t>
+              <a:t>7. Import Postman Collection</a:t>
             </a:r>
             <a:endParaRPr lang="en-US" dirty="0"/>
           </a:p>
@@ -5111,11 +5098,7 @@
             <a:pPr algn="l"/>
             <a:r>
               <a:rPr lang="en-US" dirty="0" smtClean="0"/>
-              <a:t>8. Import </a:t>
-            </a:r>
-            <a:r>
-              <a:rPr lang="en-US" dirty="0" smtClean="0"/>
-              <a:t>Postman Environment</a:t>
+              <a:t>8. Import Postman Environment</a:t>
             </a:r>
             <a:endParaRPr lang="en-US" dirty="0"/>
           </a:p>
@@ -5196,11 +5179,7 @@
             <a:pPr algn="l"/>
             <a:r>
               <a:rPr lang="en-US" dirty="0" smtClean="0"/>
-              <a:t>9. Switch </a:t>
-            </a:r>
-            <a:r>
-              <a:rPr lang="en-US" dirty="0" smtClean="0"/>
-              <a:t>Between Instances</a:t>
+              <a:t>9. Switch Between Instances</a:t>
             </a:r>
             <a:endParaRPr lang="en-US" dirty="0"/>
           </a:p>
@@ -6067,21 +6046,13 @@
             </a:r>
             <a:r>
               <a:rPr lang="en-US" sz="2400" dirty="0" smtClean="0"/>
-              <a:t> is a simple and highly scalable distributed file </a:t>
-            </a:r>
+              <a:t> is a simple and highly scalable distributed file system.</a:t>
+            </a:r>
+          </a:p>
+          <a:p>
             <a:r>
               <a:rPr lang="en-US" sz="2400" dirty="0" smtClean="0"/>
-              <a:t>system.</a:t>
-            </a:r>
-          </a:p>
-          <a:p>
-            <a:r>
-              <a:rPr lang="en-US" sz="2400" dirty="0" smtClean="0"/>
-              <a:t>There </a:t>
-            </a:r>
-            <a:r>
-              <a:rPr lang="en-US" sz="2400" dirty="0" smtClean="0"/>
-              <a:t>are two objectives:</a:t>
+              <a:t>There are two objectives:</a:t>
             </a:r>
           </a:p>
           <a:p>
@@ -6095,13 +6066,8 @@
             <a:pPr lvl="1"/>
             <a:r>
               <a:rPr lang="en-US" sz="2400" dirty="0" smtClean="0"/>
-              <a:t>to serve the files fast</a:t>
-            </a:r>
-            <a:r>
-              <a:rPr lang="en-US" sz="2400" dirty="0" smtClean="0"/>
-              <a:t>!</a:t>
-            </a:r>
-            <a:endParaRPr lang="en-US" sz="2400" dirty="0" smtClean="0"/>
+              <a:t>to serve the files fast!</a:t>
+            </a:r>
           </a:p>
         </p:txBody>
       </p:sp>
@@ -6177,13 +6143,7 @@
               <a:rPr lang="en-US" sz="2200" dirty="0" smtClean="0">
                 <a:latin typeface="Consolas" pitchFamily="49" charset="0"/>
               </a:rPr>
-              <a:t>curl </a:t>
-            </a:r>
-            <a:r>
-              <a:rPr lang="en-US" sz="2200" dirty="0" smtClean="0">
-                <a:latin typeface="Consolas" pitchFamily="49" charset="0"/>
-              </a:rPr>
-              <a:t>-L https://github.com/chrislusf/seaweedfs/releases/download/2.57/linux_amd64_large_disk.tar.gz -o </a:t>
+              <a:t>curl -L https://github.com/chrislusf/seaweedfs/releases/download/2.57/linux_amd64_large_disk.tar.gz -o </a:t>
             </a:r>
             <a:r>
               <a:rPr lang="en-US" sz="2200" dirty="0" err="1" smtClean="0">
@@ -6403,11 +6363,7 @@
             <a:pPr algn="l"/>
             <a:r>
               <a:rPr lang="en-US" dirty="0" smtClean="0"/>
-              <a:t>2. Start </a:t>
-            </a:r>
-            <a:r>
-              <a:rPr lang="en-US" dirty="0" smtClean="0"/>
-              <a:t>Seaweed Master</a:t>
+              <a:t>2. Start Seaweed Master</a:t>
             </a:r>
             <a:endParaRPr lang="en-US" dirty="0"/>
           </a:p>
@@ -6659,11 +6615,7 @@
             <a:pPr algn="l"/>
             <a:r>
               <a:rPr lang="en-US" dirty="0" smtClean="0"/>
-              <a:t>3. Start </a:t>
-            </a:r>
-            <a:r>
-              <a:rPr lang="en-US" dirty="0" smtClean="0"/>
-              <a:t>Seaweed Volume</a:t>
+              <a:t>3. Start Seaweed Volume</a:t>
             </a:r>
             <a:endParaRPr lang="en-US" dirty="0"/>
           </a:p>
